--- a/topic7/presentation/23BCE0757_THEORY_DA.pptx
+++ b/topic7/presentation/23BCE0757_THEORY_DA.pptx
@@ -5,7 +5,7 @@
     <p:sldMasterId id="2147483648" r:id="rId1"/>
   </p:sldMasterIdLst>
   <p:notesMasterIdLst>
-    <p:notesMasterId r:id="rId23"/>
+    <p:notesMasterId r:id="rId20"/>
   </p:notesMasterIdLst>
   <p:sldIdLst>
     <p:sldId id="256" r:id="rId2"/>
@@ -26,9 +26,6 @@
     <p:sldId id="271" r:id="rId17"/>
     <p:sldId id="272" r:id="rId18"/>
     <p:sldId id="273" r:id="rId19"/>
-    <p:sldId id="274" r:id="rId20"/>
-    <p:sldId id="275" r:id="rId21"/>
-    <p:sldId id="276" r:id="rId22"/>
   </p:sldIdLst>
   <p:sldSz cx="12192000" cy="6858000"/>
   <p:notesSz cx="6858000" cy="12192000"/>
@@ -162,11 +159,7 @@
           </p14:sldIdLst>
         </p14:section>
         <p14:section name="BACKUP" id="{C683794A-D3B6-88D2-7411-45EA6B750DCF}">
-          <p14:sldIdLst>
-            <p14:sldId id="274"/>
-            <p14:sldId id="275"/>
-            <p14:sldId id="276"/>
-          </p14:sldIdLst>
+          <p14:sldIdLst/>
         </p14:section>
       </p14:sectionLst>
     </p:ext>
@@ -1172,93 +1165,6 @@
 </p:notes>
 </file>
 
-<file path=ppt/notesSlides/notesSlide19.xml><?xml version="1.0" encoding="utf-8"?>
-<p:notes xmlns:a="http://schemas.openxmlformats.org/drawingml/2006/main" xmlns:r="http://schemas.openxmlformats.org/officeDocument/2006/relationships" xmlns:p="http://schemas.openxmlformats.org/presentationml/2006/main">
-  <p:cSld>
-    <p:spTree>
-      <p:nvGrpSpPr>
-        <p:cNvPr id="1" name=""/>
-        <p:cNvGrpSpPr/>
-        <p:nvPr/>
-      </p:nvGrpSpPr>
-      <p:grpSpPr>
-        <a:xfrm>
-          <a:off x="0" y="0"/>
-          <a:ext cx="0" cy="0"/>
-          <a:chOff x="0" y="0"/>
-          <a:chExt cx="0" cy="0"/>
-        </a:xfrm>
-      </p:grpSpPr>
-      <p:sp>
-        <p:nvSpPr>
-          <p:cNvPr id="2" name="Slide Image Placeholder 1"/>
-          <p:cNvSpPr>
-            <a:spLocks noGrp="1" noRot="1" noChangeAspect="1"/>
-          </p:cNvSpPr>
-          <p:nvPr>
-            <p:ph type="sldImg"/>
-          </p:nvPr>
-        </p:nvSpPr>
-        <p:spPr/>
-      </p:sp>
-      <p:sp>
-        <p:nvSpPr>
-          <p:cNvPr id="3" name="Notes Placeholder 2"/>
-          <p:cNvSpPr>
-            <a:spLocks noGrp="1"/>
-          </p:cNvSpPr>
-          <p:nvPr>
-            <p:ph type="body" idx="1"/>
-          </p:nvPr>
-        </p:nvSpPr>
-        <p:spPr/>
-        <p:txBody>
-          <a:bodyPr/>
-          <a:lstStyle/>
-          <a:p>
-            <a:r>
-              <a:rPr lang="en-US" dirty="0"/>
-              <a:t>Backup slide for questions. The answers are the same as in Appendix A of version 3 of the paper.</a:t>
-            </a:r>
-          </a:p>
-        </p:txBody>
-      </p:sp>
-      <p:sp>
-        <p:nvSpPr>
-          <p:cNvPr id="4" name="Slide Number Placeholder 3"/>
-          <p:cNvSpPr>
-            <a:spLocks noGrp="1"/>
-          </p:cNvSpPr>
-          <p:nvPr>
-            <p:ph type="sldNum" sz="quarter" idx="10"/>
-          </p:nvPr>
-        </p:nvSpPr>
-        <p:spPr/>
-        <p:txBody>
-          <a:bodyPr/>
-          <a:lstStyle/>
-          <a:p>
-            <a:fld id="{F7021451-1387-4CA6-816F-3879F97B5CBC}" type="slidenum">
-              <a:rPr lang="en-US"/>
-              <a:t>19</a:t>
-            </a:fld>
-            <a:endParaRPr lang="en-US"/>
-          </a:p>
-        </p:txBody>
-      </p:sp>
-    </p:spTree>
-    <p:extLst>
-      <p:ext uri="{BB962C8B-B14F-4D97-AF65-F5344CB8AC3E}">
-        <p14:creationId xmlns:p14="http://schemas.microsoft.com/office/powerpoint/2010/main" val="1024086991"/>
-      </p:ext>
-    </p:extLst>
-  </p:cSld>
-  <p:clrMapOvr>
-    <a:masterClrMapping/>
-  </p:clrMapOvr>
-</p:notes>
-</file>
-
 <file path=ppt/notesSlides/notesSlide2.xml><?xml version="1.0" encoding="utf-8"?>
 <p:notes xmlns:a="http://schemas.openxmlformats.org/drawingml/2006/main" xmlns:r="http://schemas.openxmlformats.org/officeDocument/2006/relationships" xmlns:p="http://schemas.openxmlformats.org/presentationml/2006/main">
   <p:cSld>
@@ -1328,180 +1234,6 @@
             <a:fld id="{F7021451-1387-4CA6-816F-3879F97B5CBC}" type="slidenum">
               <a:rPr lang="en-US"/>
               <a:t>2</a:t>
-            </a:fld>
-            <a:endParaRPr lang="en-US"/>
-          </a:p>
-        </p:txBody>
-      </p:sp>
-    </p:spTree>
-    <p:extLst>
-      <p:ext uri="{BB962C8B-B14F-4D97-AF65-F5344CB8AC3E}">
-        <p14:creationId xmlns:p14="http://schemas.microsoft.com/office/powerpoint/2010/main" val="1024086991"/>
-      </p:ext>
-    </p:extLst>
-  </p:cSld>
-  <p:clrMapOvr>
-    <a:masterClrMapping/>
-  </p:clrMapOvr>
-</p:notes>
-</file>
-
-<file path=ppt/notesSlides/notesSlide20.xml><?xml version="1.0" encoding="utf-8"?>
-<p:notes xmlns:a="http://schemas.openxmlformats.org/drawingml/2006/main" xmlns:r="http://schemas.openxmlformats.org/officeDocument/2006/relationships" xmlns:p="http://schemas.openxmlformats.org/presentationml/2006/main">
-  <p:cSld>
-    <p:spTree>
-      <p:nvGrpSpPr>
-        <p:cNvPr id="1" name=""/>
-        <p:cNvGrpSpPr/>
-        <p:nvPr/>
-      </p:nvGrpSpPr>
-      <p:grpSpPr>
-        <a:xfrm>
-          <a:off x="0" y="0"/>
-          <a:ext cx="0" cy="0"/>
-          <a:chOff x="0" y="0"/>
-          <a:chExt cx="0" cy="0"/>
-        </a:xfrm>
-      </p:grpSpPr>
-      <p:sp>
-        <p:nvSpPr>
-          <p:cNvPr id="2" name="Slide Image Placeholder 1"/>
-          <p:cNvSpPr>
-            <a:spLocks noGrp="1" noRot="1" noChangeAspect="1"/>
-          </p:cNvSpPr>
-          <p:nvPr>
-            <p:ph type="sldImg"/>
-          </p:nvPr>
-        </p:nvSpPr>
-        <p:spPr/>
-      </p:sp>
-      <p:sp>
-        <p:nvSpPr>
-          <p:cNvPr id="3" name="Notes Placeholder 2"/>
-          <p:cNvSpPr>
-            <a:spLocks noGrp="1"/>
-          </p:cNvSpPr>
-          <p:nvPr>
-            <p:ph type="body" idx="1"/>
-          </p:nvPr>
-        </p:nvSpPr>
-        <p:spPr/>
-        <p:txBody>
-          <a:bodyPr/>
-          <a:lstStyle/>
-          <a:p>
-            <a:r>
-              <a:rPr lang="en-US" dirty="0"/>
-              <a:t>Backup slide for questions. The answers are the same as in Appendix A of version 3 of the paper.</a:t>
-            </a:r>
-          </a:p>
-        </p:txBody>
-      </p:sp>
-      <p:sp>
-        <p:nvSpPr>
-          <p:cNvPr id="4" name="Slide Number Placeholder 3"/>
-          <p:cNvSpPr>
-            <a:spLocks noGrp="1"/>
-          </p:cNvSpPr>
-          <p:nvPr>
-            <p:ph type="sldNum" sz="quarter" idx="10"/>
-          </p:nvPr>
-        </p:nvSpPr>
-        <p:spPr/>
-        <p:txBody>
-          <a:bodyPr/>
-          <a:lstStyle/>
-          <a:p>
-            <a:fld id="{F7021451-1387-4CA6-816F-3879F97B5CBC}" type="slidenum">
-              <a:rPr lang="en-US"/>
-              <a:t>20</a:t>
-            </a:fld>
-            <a:endParaRPr lang="en-US"/>
-          </a:p>
-        </p:txBody>
-      </p:sp>
-    </p:spTree>
-    <p:extLst>
-      <p:ext uri="{BB962C8B-B14F-4D97-AF65-F5344CB8AC3E}">
-        <p14:creationId xmlns:p14="http://schemas.microsoft.com/office/powerpoint/2010/main" val="1024086991"/>
-      </p:ext>
-    </p:extLst>
-  </p:cSld>
-  <p:clrMapOvr>
-    <a:masterClrMapping/>
-  </p:clrMapOvr>
-</p:notes>
-</file>
-
-<file path=ppt/notesSlides/notesSlide21.xml><?xml version="1.0" encoding="utf-8"?>
-<p:notes xmlns:a="http://schemas.openxmlformats.org/drawingml/2006/main" xmlns:r="http://schemas.openxmlformats.org/officeDocument/2006/relationships" xmlns:p="http://schemas.openxmlformats.org/presentationml/2006/main">
-  <p:cSld>
-    <p:spTree>
-      <p:nvGrpSpPr>
-        <p:cNvPr id="1" name=""/>
-        <p:cNvGrpSpPr/>
-        <p:nvPr/>
-      </p:nvGrpSpPr>
-      <p:grpSpPr>
-        <a:xfrm>
-          <a:off x="0" y="0"/>
-          <a:ext cx="0" cy="0"/>
-          <a:chOff x="0" y="0"/>
-          <a:chExt cx="0" cy="0"/>
-        </a:xfrm>
-      </p:grpSpPr>
-      <p:sp>
-        <p:nvSpPr>
-          <p:cNvPr id="2" name="Slide Image Placeholder 1"/>
-          <p:cNvSpPr>
-            <a:spLocks noGrp="1" noRot="1" noChangeAspect="1"/>
-          </p:cNvSpPr>
-          <p:nvPr>
-            <p:ph type="sldImg"/>
-          </p:nvPr>
-        </p:nvSpPr>
-        <p:spPr/>
-      </p:sp>
-      <p:sp>
-        <p:nvSpPr>
-          <p:cNvPr id="3" name="Notes Placeholder 2"/>
-          <p:cNvSpPr>
-            <a:spLocks noGrp="1"/>
-          </p:cNvSpPr>
-          <p:nvPr>
-            <p:ph type="body" idx="1"/>
-          </p:nvPr>
-        </p:nvSpPr>
-        <p:spPr/>
-        <p:txBody>
-          <a:bodyPr/>
-          <a:lstStyle/>
-          <a:p>
-            <a:r>
-              <a:rPr lang="en-US" dirty="0"/>
-              <a:t>Backup slide for questions. The answers are the same as in Appendix A of version 3 of the paper.</a:t>
-            </a:r>
-          </a:p>
-        </p:txBody>
-      </p:sp>
-      <p:sp>
-        <p:nvSpPr>
-          <p:cNvPr id="4" name="Slide Number Placeholder 3"/>
-          <p:cNvSpPr>
-            <a:spLocks noGrp="1"/>
-          </p:cNvSpPr>
-          <p:nvPr>
-            <p:ph type="sldNum" sz="quarter" idx="10"/>
-          </p:nvPr>
-        </p:nvSpPr>
-        <p:spPr/>
-        <p:txBody>
-          <a:bodyPr/>
-          <a:lstStyle/>
-          <a:p>
-            <a:fld id="{F7021451-1387-4CA6-816F-3879F97B5CBC}" type="slidenum">
-              <a:rPr lang="en-US"/>
-              <a:t>21</a:t>
             </a:fld>
             <a:endParaRPr lang="en-US"/>
           </a:p>
@@ -3155,7 +2887,7 @@
                 <a:ea typeface="Calibri" pitchFamily="34" charset="-122"/>
                 <a:cs typeface="Calibri" pitchFamily="34" charset="-120"/>
               </a:rPr>
-              <a:t>M Naga Sai Dattu (23BCE0757)</a:t>
+              <a:t>Marupaka Naga Sai Dattu (23BCE0757)</a:t>
             </a:r>
             <a:endParaRPr lang="en-US" sz="1700" dirty="0"/>
           </a:p>
@@ -16118,389 +15850,6 @@
 </p:sld>
 </file>
 
-<file path=ppt/slides/slide19.xml><?xml version="1.0" encoding="utf-8"?>
-<p:sld xmlns:a="http://schemas.openxmlformats.org/drawingml/2006/main" xmlns:r="http://schemas.openxmlformats.org/officeDocument/2006/relationships" xmlns:p="http://schemas.openxmlformats.org/presentationml/2006/main">
-  <p:cSld name="Slide 19">
-    <p:spTree>
-      <p:nvGrpSpPr>
-        <p:cNvPr id="1" name=""/>
-        <p:cNvGrpSpPr/>
-        <p:nvPr/>
-      </p:nvGrpSpPr>
-      <p:grpSpPr>
-        <a:xfrm>
-          <a:off x="0" y="0"/>
-          <a:ext cx="0" cy="0"/>
-          <a:chOff x="0" y="0"/>
-          <a:chExt cx="0" cy="0"/>
-        </a:xfrm>
-      </p:grpSpPr>
-      <p:sp>
-        <p:nvSpPr>
-          <p:cNvPr id="2" name="Text 0"/>
-          <p:cNvSpPr>
-            <a:spLocks noGrp="1"/>
-          </p:cNvSpPr>
-          <p:nvPr>
-            <p:ph type="body" idx="100" hasCustomPrompt="1"/>
-          </p:nvPr>
-        </p:nvSpPr>
-        <p:spPr>
-          <a:xfrm>
-            <a:off x="548640" y="292608"/>
-            <a:ext cx="8229600" cy="274320"/>
-          </a:xfrm>
-          <a:prstGeom prst="rect">
-            <a:avLst/>
-          </a:prstGeom>
-          <a:noFill/>
-          <a:ln/>
-        </p:spPr>
-        <p:txBody>
-          <a:bodyPr wrap="square" lIns="0" tIns="0" rIns="0" bIns="0" rtlCol="0" anchor="ctr"/>
-          <a:lstStyle/>
-          <a:p>
-            <a:pPr marL="0" indent="0">
-              <a:buNone/>
-            </a:pPr>
-            <a:r>
-              <a:rPr lang="en-US" sz="1200" b="1" kern="0" spc="150" dirty="0">
-                <a:solidFill>
-                  <a:srgbClr val="A97C2F"/>
-                </a:solidFill>
-                <a:latin typeface="Calibri" pitchFamily="34" charset="0"/>
-                <a:ea typeface="Calibri" pitchFamily="34" charset="-122"/>
-                <a:cs typeface="Calibri" pitchFamily="34" charset="-120"/>
-              </a:rPr>
-              <a:t>BACKUP</a:t>
-            </a:r>
-            <a:endParaRPr lang="en-US" sz="1200" dirty="0"/>
-          </a:p>
-        </p:txBody>
-      </p:sp>
-      <p:sp>
-        <p:nvSpPr>
-          <p:cNvPr id="3" name="Text 0"/>
-          <p:cNvSpPr>
-            <a:spLocks noGrp="1"/>
-          </p:cNvSpPr>
-          <p:nvPr>
-            <p:ph type="title" idx="101" hasCustomPrompt="1"/>
-          </p:nvPr>
-        </p:nvSpPr>
-        <p:spPr>
-          <a:xfrm>
-            <a:off x="548640" y="566928"/>
-            <a:ext cx="11094415" cy="685800"/>
-          </a:xfrm>
-          <a:prstGeom prst="rect">
-            <a:avLst/>
-          </a:prstGeom>
-          <a:noFill/>
-          <a:ln/>
-        </p:spPr>
-        <p:txBody>
-          <a:bodyPr wrap="square" lIns="0" tIns="0" rIns="0" bIns="0" rtlCol="0" anchor="ctr"/>
-          <a:lstStyle/>
-          <a:p>
-            <a:pPr marL="0" indent="0" algn="l">
-              <a:buNone/>
-            </a:pPr>
-            <a:r>
-              <a:rPr lang="en-US" sz="2800" b="1" dirty="0">
-                <a:solidFill>
-                  <a:srgbClr val="1B2A4A"/>
-                </a:solidFill>
-                <a:latin typeface="Cambria" pitchFamily="34" charset="0"/>
-                <a:ea typeface="Cambria" pitchFamily="34" charset="-122"/>
-                <a:cs typeface="Cambria" pitchFamily="34" charset="-120"/>
-              </a:rPr>
-              <a:t>Anticipated Questions (1 of 3)</a:t>
-            </a:r>
-            <a:endParaRPr lang="en-US" sz="2800" dirty="0"/>
-          </a:p>
-        </p:txBody>
-      </p:sp>
-      <p:sp>
-        <p:nvSpPr>
-          <p:cNvPr id="5" name="q3_bg"/>
-          <p:cNvSpPr/>
-          <p:nvPr/>
-        </p:nvSpPr>
-        <p:spPr>
-          <a:xfrm>
-            <a:off x="548640" y="1417320"/>
-            <a:ext cx="11094415" cy="2240280"/>
-          </a:xfrm>
-          <a:prstGeom prst="roundRect">
-            <a:avLst>
-              <a:gd name="adj" fmla="val 3265"/>
-            </a:avLst>
-          </a:prstGeom>
-          <a:solidFill>
-            <a:srgbClr val="EEF2F8"/>
-          </a:solidFill>
-          <a:ln w="12700">
-            <a:solidFill>
-              <a:srgbClr val="EEF2F8"/>
-            </a:solidFill>
-            <a:prstDash val="solid"/>
-          </a:ln>
-        </p:spPr>
-        <p:txBody>
-          <a:bodyPr/>
-          <a:lstStyle/>
-          <a:p>
-            <a:endParaRPr lang="en-US"/>
-          </a:p>
-        </p:txBody>
-      </p:sp>
-      <p:sp>
-        <p:nvSpPr>
-          <p:cNvPr id="6" name="q3_head"/>
-          <p:cNvSpPr txBox="1"/>
-          <p:nvPr/>
-        </p:nvSpPr>
-        <p:spPr>
-          <a:xfrm>
-            <a:off x="777240" y="1600200"/>
-            <a:ext cx="10637215" cy="365760"/>
-          </a:xfrm>
-          <a:prstGeom prst="rect">
-            <a:avLst/>
-          </a:prstGeom>
-          <a:noFill/>
-          <a:ln/>
-        </p:spPr>
-        <p:txBody>
-          <a:bodyPr wrap="square" lIns="0" tIns="0" rIns="0" bIns="0" rtlCol="0" anchor="ctr"/>
-          <a:lstStyle/>
-          <a:p>
-            <a:pPr marL="0" indent="0">
-              <a:buNone/>
-            </a:pPr>
-            <a:r>
-              <a:rPr lang="en-US" sz="1800" b="1" dirty="0">
-                <a:solidFill>
-                  <a:srgbClr val="1B2A4A"/>
-                </a:solidFill>
-                <a:latin typeface="Cambria" pitchFamily="34" charset="0"/>
-                <a:ea typeface="Cambria" pitchFamily="34" charset="-122"/>
-                <a:cs typeface="Cambria" pitchFamily="34" charset="-120"/>
-              </a:rPr>
-              <a:t>Why are the learners so far ahead of the rule on real data?</a:t>
-            </a:r>
-            <a:endParaRPr lang="en-US" sz="1800" dirty="0"/>
-          </a:p>
-        </p:txBody>
-      </p:sp>
-      <p:sp>
-        <p:nvSpPr>
-          <p:cNvPr id="7" name="a3"/>
-          <p:cNvSpPr txBox="1"/>
-          <p:nvPr/>
-        </p:nvSpPr>
-        <p:spPr>
-          <a:xfrm>
-            <a:off x="777240" y="2057400"/>
-            <a:ext cx="10637215" cy="1463040"/>
-          </a:xfrm>
-          <a:prstGeom prst="rect">
-            <a:avLst/>
-          </a:prstGeom>
-          <a:noFill/>
-          <a:ln/>
-        </p:spPr>
-        <p:txBody>
-          <a:bodyPr wrap="square" lIns="0" tIns="0" rIns="0" bIns="0" rtlCol="0" anchor="t"/>
-          <a:lstStyle/>
-          <a:p>
-            <a:pPr marL="0" indent="0">
-              <a:buNone/>
-            </a:pPr>
-            <a:r>
-              <a:rPr lang="en-US" sz="1600" dirty="0">
-                <a:solidFill>
-                  <a:srgbClr val="1F2933"/>
-                </a:solidFill>
-                <a:latin typeface="Calibri" pitchFamily="34" charset="0"/>
-                <a:ea typeface="Calibri" pitchFamily="34" charset="-122"/>
-                <a:cs typeface="Calibri" pitchFamily="34" charset="-120"/>
-              </a:rPr>
-              <a:t>The rule books one or two extra patients, and with about 19% of patients not coming that leaves 44.3 idle slots per episode and a summed waiting list of 211. The learners book more in some states and cut the waiting list to 98 to 115.</a:t>
-            </a:r>
-            <a:endParaRPr lang="en-US" sz="1600" dirty="0"/>
-          </a:p>
-        </p:txBody>
-      </p:sp>
-      <p:sp>
-        <p:nvSpPr>
-          <p:cNvPr id="8" name="q7_bg"/>
-          <p:cNvSpPr/>
-          <p:nvPr/>
-        </p:nvSpPr>
-        <p:spPr>
-          <a:xfrm>
-            <a:off x="548640" y="3886200"/>
-            <a:ext cx="11094415" cy="2240280"/>
-          </a:xfrm>
-          <a:prstGeom prst="roundRect">
-            <a:avLst>
-              <a:gd name="adj" fmla="val 3265"/>
-            </a:avLst>
-          </a:prstGeom>
-          <a:solidFill>
-            <a:srgbClr val="EEF2F8"/>
-          </a:solidFill>
-          <a:ln w="12700">
-            <a:solidFill>
-              <a:srgbClr val="EEF2F8"/>
-            </a:solidFill>
-            <a:prstDash val="solid"/>
-          </a:ln>
-        </p:spPr>
-        <p:txBody>
-          <a:bodyPr/>
-          <a:lstStyle/>
-          <a:p>
-            <a:endParaRPr lang="en-US"/>
-          </a:p>
-        </p:txBody>
-      </p:sp>
-      <p:sp>
-        <p:nvSpPr>
-          <p:cNvPr id="9" name="q7_head"/>
-          <p:cNvSpPr txBox="1"/>
-          <p:nvPr/>
-        </p:nvSpPr>
-        <p:spPr>
-          <a:xfrm>
-            <a:off x="777240" y="4069080"/>
-            <a:ext cx="10637215" cy="365760"/>
-          </a:xfrm>
-          <a:prstGeom prst="rect">
-            <a:avLst/>
-          </a:prstGeom>
-          <a:noFill/>
-          <a:ln/>
-        </p:spPr>
-        <p:txBody>
-          <a:bodyPr wrap="square" lIns="0" tIns="0" rIns="0" bIns="0" rtlCol="0" anchor="ctr"/>
-          <a:lstStyle/>
-          <a:p>
-            <a:pPr marL="0" indent="0">
-              <a:buNone/>
-            </a:pPr>
-            <a:r>
-              <a:rPr lang="en-US" sz="1800" b="1" dirty="0">
-                <a:solidFill>
-                  <a:srgbClr val="1B2A4A"/>
-                </a:solidFill>
-                <a:latin typeface="Cambria" pitchFamily="34" charset="0"/>
-                <a:ea typeface="Cambria" pitchFamily="34" charset="-122"/>
-                <a:cs typeface="Cambria" pitchFamily="34" charset="-120"/>
-              </a:rPr>
-              <a:t>Why does the structured model score more than the oracle fitted to ten times as much data?</a:t>
-            </a:r>
-            <a:endParaRPr lang="en-US" sz="1800" dirty="0"/>
-          </a:p>
-        </p:txBody>
-      </p:sp>
-      <p:sp>
-        <p:nvSpPr>
-          <p:cNvPr id="10" name="a7"/>
-          <p:cNvSpPr txBox="1"/>
-          <p:nvPr/>
-        </p:nvSpPr>
-        <p:spPr>
-          <a:xfrm>
-            <a:off x="777240" y="4526280"/>
-            <a:ext cx="10637215" cy="1463040"/>
-          </a:xfrm>
-          <a:prstGeom prst="rect">
-            <a:avLst/>
-          </a:prstGeom>
-          <a:noFill/>
-          <a:ln/>
-        </p:spPr>
-        <p:txBody>
-          <a:bodyPr wrap="square" lIns="0" tIns="0" rIns="0" bIns="0" rtlCol="0" anchor="t"/>
-          <a:lstStyle/>
-          <a:p>
-            <a:pPr marL="0" indent="0">
-              <a:buNone/>
-            </a:pPr>
-            <a:r>
-              <a:rPr lang="en-US" sz="1600" dirty="0">
-                <a:solidFill>
-                  <a:srgbClr val="1F2933"/>
-                </a:solidFill>
-                <a:latin typeface="Calibri" pitchFamily="34" charset="0"/>
-                <a:ea typeface="Calibri" pitchFamily="34" charset="-122"/>
-                <a:cs typeface="Calibri" pitchFamily="34" charset="-120"/>
-              </a:rPr>
-              <a:t>The oracle still estimates P(s' | s, a) pair by pair, so with 1,500 days some pairs that the optimum uses remain below the support threshold and the rest carry sampling error. The structured model estimates 26 numbers that every logged session informs and computes the rest from the clinic's rules; its return varies by ±0.01 over 20 data draws.</a:t>
-            </a:r>
-            <a:endParaRPr lang="en-US" sz="1600" dirty="0"/>
-          </a:p>
-        </p:txBody>
-      </p:sp>
-      <p:sp>
-        <p:nvSpPr>
-          <p:cNvPr id="25" name="Slide Number Placeholder 0"/>
-          <p:cNvSpPr>
-            <a:spLocks noGrp="1"/>
-          </p:cNvSpPr>
-          <p:nvPr>
-            <p:ph type="sldNum" sz="quarter" idx="4294967295"/>
-          </p:nvPr>
-        </p:nvSpPr>
-        <p:spPr>
-          <a:xfrm>
-            <a:off x="10911535" y="6400800"/>
-            <a:ext cx="731520" cy="274320"/>
-          </a:xfrm>
-          <a:prstGeom prst="rect">
-            <a:avLst/>
-          </a:prstGeom>
-          <a:extLst>
-            <a:ext uri="{C572A759-6A51-4108-AA02-DFA0A04FC94B}">
-              <ma14:wrappingTextBoxFlag xmlns:ma14="http://schemas.microsoft.com/office/mac/drawingml/2011/main" xmlns="" val="0"/>
-            </a:ext>
-          </a:extLst>
-        </p:spPr>
-        <p:txBody>
-          <a:bodyPr/>
-          <a:lstStyle>
-            <a:lvl1pPr>
-              <a:defRPr sz="1000">
-                <a:solidFill>
-                  <a:srgbClr val="5B6770"/>
-                </a:solidFill>
-                <a:latin typeface="Calibri"/>
-                <a:ea typeface="Calibri"/>
-                <a:cs typeface="Calibri"/>
-              </a:defRPr>
-            </a:lvl1pPr>
-          </a:lstStyle>
-          <a:p>
-            <a:pPr algn="r"/>
-            <a:fld id="{F7021451-1387-4CA6-816F-3879F97B5CBC}" type="slidenum">
-              <a:rPr lang="en-US" b="0"/>
-              <a:t>19</a:t>
-            </a:fld>
-            <a:endParaRPr lang="en-US"/>
-          </a:p>
-        </p:txBody>
-      </p:sp>
-    </p:spTree>
-  </p:cSld>
-  <p:clrMapOvr>
-    <a:masterClrMapping/>
-  </p:clrMapOvr>
-</p:sld>
-</file>
-
 <file path=ppt/slides/slide2.xml><?xml version="1.0" encoding="utf-8"?>
 <p:sld xmlns:a="http://schemas.openxmlformats.org/drawingml/2006/main" xmlns:r="http://schemas.openxmlformats.org/officeDocument/2006/relationships" xmlns:p="http://schemas.openxmlformats.org/presentationml/2006/main">
   <p:cSld name="Slide 2">
@@ -16998,772 +16347,6 @@
             <a:fld id="{F7021451-1387-4CA6-816F-3879F97B5CBC}" type="slidenum">
               <a:rPr lang="en-US" b="0"/>
               <a:t>2</a:t>
-            </a:fld>
-            <a:endParaRPr lang="en-US"/>
-          </a:p>
-        </p:txBody>
-      </p:sp>
-    </p:spTree>
-  </p:cSld>
-  <p:clrMapOvr>
-    <a:masterClrMapping/>
-  </p:clrMapOvr>
-</p:sld>
-</file>
-
-<file path=ppt/slides/slide20.xml><?xml version="1.0" encoding="utf-8"?>
-<p:sld xmlns:a="http://schemas.openxmlformats.org/drawingml/2006/main" xmlns:r="http://schemas.openxmlformats.org/officeDocument/2006/relationships" xmlns:p="http://schemas.openxmlformats.org/presentationml/2006/main">
-  <p:cSld name="Slide 20">
-    <p:spTree>
-      <p:nvGrpSpPr>
-        <p:cNvPr id="1" name=""/>
-        <p:cNvGrpSpPr/>
-        <p:nvPr/>
-      </p:nvGrpSpPr>
-      <p:grpSpPr>
-        <a:xfrm>
-          <a:off x="0" y="0"/>
-          <a:ext cx="0" cy="0"/>
-          <a:chOff x="0" y="0"/>
-          <a:chExt cx="0" cy="0"/>
-        </a:xfrm>
-      </p:grpSpPr>
-      <p:sp>
-        <p:nvSpPr>
-          <p:cNvPr id="2" name="Text 0"/>
-          <p:cNvSpPr>
-            <a:spLocks noGrp="1"/>
-          </p:cNvSpPr>
-          <p:nvPr>
-            <p:ph type="body" idx="100" hasCustomPrompt="1"/>
-          </p:nvPr>
-        </p:nvSpPr>
-        <p:spPr>
-          <a:xfrm>
-            <a:off x="548640" y="292608"/>
-            <a:ext cx="8229600" cy="274320"/>
-          </a:xfrm>
-          <a:prstGeom prst="rect">
-            <a:avLst/>
-          </a:prstGeom>
-          <a:noFill/>
-          <a:ln/>
-        </p:spPr>
-        <p:txBody>
-          <a:bodyPr wrap="square" lIns="0" tIns="0" rIns="0" bIns="0" rtlCol="0" anchor="ctr"/>
-          <a:lstStyle/>
-          <a:p>
-            <a:pPr marL="0" indent="0">
-              <a:buNone/>
-            </a:pPr>
-            <a:r>
-              <a:rPr lang="en-US" sz="1200" b="1" kern="0" spc="150" dirty="0">
-                <a:solidFill>
-                  <a:srgbClr val="A97C2F"/>
-                </a:solidFill>
-                <a:latin typeface="Calibri" pitchFamily="34" charset="0"/>
-                <a:ea typeface="Calibri" pitchFamily="34" charset="-122"/>
-                <a:cs typeface="Calibri" pitchFamily="34" charset="-120"/>
-              </a:rPr>
-              <a:t>BACKUP</a:t>
-            </a:r>
-            <a:endParaRPr lang="en-US" sz="1200" dirty="0"/>
-          </a:p>
-        </p:txBody>
-      </p:sp>
-      <p:sp>
-        <p:nvSpPr>
-          <p:cNvPr id="3" name="Text 0"/>
-          <p:cNvSpPr>
-            <a:spLocks noGrp="1"/>
-          </p:cNvSpPr>
-          <p:nvPr>
-            <p:ph type="title" idx="101" hasCustomPrompt="1"/>
-          </p:nvPr>
-        </p:nvSpPr>
-        <p:spPr>
-          <a:xfrm>
-            <a:off x="548640" y="566928"/>
-            <a:ext cx="11094415" cy="685800"/>
-          </a:xfrm>
-          <a:prstGeom prst="rect">
-            <a:avLst/>
-          </a:prstGeom>
-          <a:noFill/>
-          <a:ln/>
-        </p:spPr>
-        <p:txBody>
-          <a:bodyPr wrap="square" lIns="0" tIns="0" rIns="0" bIns="0" rtlCol="0" anchor="ctr"/>
-          <a:lstStyle/>
-          <a:p>
-            <a:pPr marL="0" indent="0" algn="l">
-              <a:buNone/>
-            </a:pPr>
-            <a:r>
-              <a:rPr lang="en-US" sz="2800" b="1" dirty="0">
-                <a:solidFill>
-                  <a:srgbClr val="1B2A4A"/>
-                </a:solidFill>
-                <a:latin typeface="Cambria" pitchFamily="34" charset="0"/>
-                <a:ea typeface="Cambria" pitchFamily="34" charset="-122"/>
-                <a:cs typeface="Cambria" pitchFamily="34" charset="-120"/>
-              </a:rPr>
-              <a:t>Anticipated Questions (2 of 3)</a:t>
-            </a:r>
-            <a:endParaRPr lang="en-US" sz="2800" dirty="0"/>
-          </a:p>
-        </p:txBody>
-      </p:sp>
-      <p:sp>
-        <p:nvSpPr>
-          <p:cNvPr id="5" name="q8_bg"/>
-          <p:cNvSpPr/>
-          <p:nvPr/>
-        </p:nvSpPr>
-        <p:spPr>
-          <a:xfrm>
-            <a:off x="548640" y="1417320"/>
-            <a:ext cx="11094415" cy="2240280"/>
-          </a:xfrm>
-          <a:prstGeom prst="roundRect">
-            <a:avLst>
-              <a:gd name="adj" fmla="val 3265"/>
-            </a:avLst>
-          </a:prstGeom>
-          <a:solidFill>
-            <a:srgbClr val="EEF2F8"/>
-          </a:solidFill>
-          <a:ln w="12700">
-            <a:solidFill>
-              <a:srgbClr val="EEF2F8"/>
-            </a:solidFill>
-            <a:prstDash val="solid"/>
-          </a:ln>
-        </p:spPr>
-        <p:txBody>
-          <a:bodyPr/>
-          <a:lstStyle/>
-          <a:p>
-            <a:endParaRPr lang="en-US"/>
-          </a:p>
-        </p:txBody>
-      </p:sp>
-      <p:sp>
-        <p:nvSpPr>
-          <p:cNvPr id="6" name="q8_head"/>
-          <p:cNvSpPr txBox="1"/>
-          <p:nvPr/>
-        </p:nvSpPr>
-        <p:spPr>
-          <a:xfrm>
-            <a:off x="777240" y="1600200"/>
-            <a:ext cx="10637215" cy="365760"/>
-          </a:xfrm>
-          <a:prstGeom prst="rect">
-            <a:avLst/>
-          </a:prstGeom>
-          <a:noFill/>
-          <a:ln/>
-        </p:spPr>
-        <p:txBody>
-          <a:bodyPr wrap="square" lIns="0" tIns="0" rIns="0" bIns="0" rtlCol="0" anchor="ctr"/>
-          <a:lstStyle/>
-          <a:p>
-            <a:pPr marL="0" indent="0">
-              <a:buNone/>
-            </a:pPr>
-            <a:r>
-              <a:rPr lang="en-US" sz="1800" b="1" dirty="0">
-                <a:solidFill>
-                  <a:srgbClr val="1B2A4A"/>
-                </a:solidFill>
-                <a:latin typeface="Cambria" pitchFamily="34" charset="0"/>
-                <a:ea typeface="Cambria" pitchFamily="34" charset="-122"/>
-                <a:cs typeface="Cambria" pitchFamily="34" charset="-120"/>
-              </a:rPr>
-              <a:t>Is the comparison fair to the learners?</a:t>
-            </a:r>
-            <a:endParaRPr lang="en-US" sz="1800" dirty="0"/>
-          </a:p>
-        </p:txBody>
-      </p:sp>
-      <p:sp>
-        <p:nvSpPr>
-          <p:cNvPr id="7" name="a8"/>
-          <p:cNvSpPr txBox="1"/>
-          <p:nvPr/>
-        </p:nvSpPr>
-        <p:spPr>
-          <a:xfrm>
-            <a:off x="777240" y="2057400"/>
-            <a:ext cx="10637215" cy="1463040"/>
-          </a:xfrm>
-          <a:prstGeom prst="rect">
-            <a:avLst/>
-          </a:prstGeom>
-          <a:noFill/>
-          <a:ln/>
-        </p:spPr>
-        <p:txBody>
-          <a:bodyPr wrap="square" lIns="0" tIns="0" rIns="0" bIns="0" rtlCol="0" anchor="t"/>
-          <a:lstStyle/>
-          <a:p>
-            <a:pPr marL="0" indent="0">
-              <a:buNone/>
-            </a:pPr>
-            <a:r>
-              <a:rPr lang="en-US" sz="1600" dirty="0">
-                <a:solidFill>
-                  <a:srgbClr val="1F2933"/>
-                </a:solidFill>
-                <a:latin typeface="Calibri" pitchFamily="34" charset="0"/>
-                <a:ea typeface="Calibri" pitchFamily="34" charset="-122"/>
-                <a:cs typeface="Calibri" pitchFamily="34" charset="-120"/>
-              </a:rPr>
-              <a:t>They receive the same logged days, the same solver for DP and the same scoring episodes. What the structured model has in addition is the clinic's rules, which is one of our limitations (slide 16): a clinic that cannot state them cannot use it.</a:t>
-            </a:r>
-            <a:endParaRPr lang="en-US" sz="1600" dirty="0"/>
-          </a:p>
-        </p:txBody>
-      </p:sp>
-      <p:sp>
-        <p:nvSpPr>
-          <p:cNvPr id="8" name="q9_bg"/>
-          <p:cNvSpPr/>
-          <p:nvPr/>
-        </p:nvSpPr>
-        <p:spPr>
-          <a:xfrm>
-            <a:off x="548640" y="3886200"/>
-            <a:ext cx="11094415" cy="2240280"/>
-          </a:xfrm>
-          <a:prstGeom prst="roundRect">
-            <a:avLst>
-              <a:gd name="adj" fmla="val 3265"/>
-            </a:avLst>
-          </a:prstGeom>
-          <a:solidFill>
-            <a:srgbClr val="EEF2F8"/>
-          </a:solidFill>
-          <a:ln w="12700">
-            <a:solidFill>
-              <a:srgbClr val="EEF2F8"/>
-            </a:solidFill>
-            <a:prstDash val="solid"/>
-          </a:ln>
-        </p:spPr>
-        <p:txBody>
-          <a:bodyPr/>
-          <a:lstStyle/>
-          <a:p>
-            <a:endParaRPr lang="en-US"/>
-          </a:p>
-        </p:txBody>
-      </p:sp>
-      <p:sp>
-        <p:nvSpPr>
-          <p:cNvPr id="9" name="q9_head"/>
-          <p:cNvSpPr txBox="1"/>
-          <p:nvPr/>
-        </p:nvSpPr>
-        <p:spPr>
-          <a:xfrm>
-            <a:off x="777240" y="4069080"/>
-            <a:ext cx="10637215" cy="365760"/>
-          </a:xfrm>
-          <a:prstGeom prst="rect">
-            <a:avLst/>
-          </a:prstGeom>
-          <a:noFill/>
-          <a:ln/>
-        </p:spPr>
-        <p:txBody>
-          <a:bodyPr wrap="square" lIns="0" tIns="0" rIns="0" bIns="0" rtlCol="0" anchor="ctr"/>
-          <a:lstStyle/>
-          <a:p>
-            <a:pPr marL="0" indent="0">
-              <a:buNone/>
-            </a:pPr>
-            <a:r>
-              <a:rPr lang="en-US" sz="1800" b="1" dirty="0">
-                <a:solidFill>
-                  <a:srgbClr val="1B2A4A"/>
-                </a:solidFill>
-                <a:latin typeface="Cambria" pitchFamily="34" charset="0"/>
-                <a:ea typeface="Cambria" pitchFamily="34" charset="-122"/>
-                <a:cs typeface="Cambria" pitchFamily="34" charset="-120"/>
-              </a:rPr>
-              <a:t>Why is the margin over the single session optimiser so small?</a:t>
-            </a:r>
-            <a:endParaRPr lang="en-US" sz="1800" dirty="0"/>
-          </a:p>
-        </p:txBody>
-      </p:sp>
-      <p:sp>
-        <p:nvSpPr>
-          <p:cNvPr id="10" name="a9"/>
-          <p:cNvSpPr txBox="1"/>
-          <p:nvPr/>
-        </p:nvSpPr>
-        <p:spPr>
-          <a:xfrm>
-            <a:off x="777240" y="4526280"/>
-            <a:ext cx="10637215" cy="1463040"/>
-          </a:xfrm>
-          <a:prstGeom prst="rect">
-            <a:avLst/>
-          </a:prstGeom>
-          <a:noFill/>
-          <a:ln/>
-        </p:spPr>
-        <p:txBody>
-          <a:bodyPr wrap="square" lIns="0" tIns="0" rIns="0" bIns="0" rtlCol="0" anchor="t"/>
-          <a:lstStyle/>
-          <a:p>
-            <a:pPr marL="0" indent="0">
-              <a:buNone/>
-            </a:pPr>
-            <a:r>
-              <a:rPr lang="en-US" sz="1600" dirty="0">
-                <a:solidFill>
-                  <a:srgbClr val="1F2933"/>
-                </a:solidFill>
-                <a:latin typeface="Calibri" pitchFamily="34" charset="0"/>
-                <a:ea typeface="Calibri" pitchFamily="34" charset="-122"/>
-                <a:cs typeface="Calibri" pitchFamily="34" charset="-120"/>
-              </a:rPr>
-              <a:t>In the default setting the waiting list stays short under both policies (1.83 and 1.67 patients per session), so little is left to plan for, and the optimiser uses each patient's own risk while the structured model uses a band. When the waiting list is under pressure the margin reaches 33.3% (slide 13).</a:t>
-            </a:r>
-            <a:endParaRPr lang="en-US" sz="1600" dirty="0"/>
-          </a:p>
-        </p:txBody>
-      </p:sp>
-      <p:sp>
-        <p:nvSpPr>
-          <p:cNvPr id="25" name="Slide Number Placeholder 0"/>
-          <p:cNvSpPr>
-            <a:spLocks noGrp="1"/>
-          </p:cNvSpPr>
-          <p:nvPr>
-            <p:ph type="sldNum" sz="quarter" idx="4294967295"/>
-          </p:nvPr>
-        </p:nvSpPr>
-        <p:spPr>
-          <a:xfrm>
-            <a:off x="10911535" y="6400800"/>
-            <a:ext cx="731520" cy="274320"/>
-          </a:xfrm>
-          <a:prstGeom prst="rect">
-            <a:avLst/>
-          </a:prstGeom>
-          <a:extLst>
-            <a:ext uri="{C572A759-6A51-4108-AA02-DFA0A04FC94B}">
-              <ma14:wrappingTextBoxFlag xmlns:ma14="http://schemas.microsoft.com/office/mac/drawingml/2011/main" xmlns="" val="0"/>
-            </a:ext>
-          </a:extLst>
-        </p:spPr>
-        <p:txBody>
-          <a:bodyPr/>
-          <a:lstStyle>
-            <a:lvl1pPr>
-              <a:defRPr sz="1000">
-                <a:solidFill>
-                  <a:srgbClr val="5B6770"/>
-                </a:solidFill>
-                <a:latin typeface="Calibri"/>
-                <a:ea typeface="Calibri"/>
-                <a:cs typeface="Calibri"/>
-              </a:defRPr>
-            </a:lvl1pPr>
-          </a:lstStyle>
-          <a:p>
-            <a:pPr algn="r"/>
-            <a:fld id="{F7021451-1387-4CA6-816F-3879F97B5CBC}" type="slidenum">
-              <a:rPr lang="en-US" b="0"/>
-              <a:t>20</a:t>
-            </a:fld>
-            <a:endParaRPr lang="en-US"/>
-          </a:p>
-        </p:txBody>
-      </p:sp>
-    </p:spTree>
-  </p:cSld>
-  <p:clrMapOvr>
-    <a:masterClrMapping/>
-  </p:clrMapOvr>
-</p:sld>
-</file>
-
-<file path=ppt/slides/slide21.xml><?xml version="1.0" encoding="utf-8"?>
-<p:sld xmlns:a="http://schemas.openxmlformats.org/drawingml/2006/main" xmlns:r="http://schemas.openxmlformats.org/officeDocument/2006/relationships" xmlns:p="http://schemas.openxmlformats.org/presentationml/2006/main">
-  <p:cSld name="Slide 21">
-    <p:spTree>
-      <p:nvGrpSpPr>
-        <p:cNvPr id="1" name=""/>
-        <p:cNvGrpSpPr/>
-        <p:nvPr/>
-      </p:nvGrpSpPr>
-      <p:grpSpPr>
-        <a:xfrm>
-          <a:off x="0" y="0"/>
-          <a:ext cx="0" cy="0"/>
-          <a:chOff x="0" y="0"/>
-          <a:chExt cx="0" cy="0"/>
-        </a:xfrm>
-      </p:grpSpPr>
-      <p:sp>
-        <p:nvSpPr>
-          <p:cNvPr id="2" name="Text 0"/>
-          <p:cNvSpPr>
-            <a:spLocks noGrp="1"/>
-          </p:cNvSpPr>
-          <p:nvPr>
-            <p:ph type="body" idx="100" hasCustomPrompt="1"/>
-          </p:nvPr>
-        </p:nvSpPr>
-        <p:spPr>
-          <a:xfrm>
-            <a:off x="548640" y="292608"/>
-            <a:ext cx="8229600" cy="274320"/>
-          </a:xfrm>
-          <a:prstGeom prst="rect">
-            <a:avLst/>
-          </a:prstGeom>
-          <a:noFill/>
-          <a:ln/>
-        </p:spPr>
-        <p:txBody>
-          <a:bodyPr wrap="square" lIns="0" tIns="0" rIns="0" bIns="0" rtlCol="0" anchor="ctr"/>
-          <a:lstStyle/>
-          <a:p>
-            <a:pPr marL="0" indent="0">
-              <a:buNone/>
-            </a:pPr>
-            <a:r>
-              <a:rPr lang="en-US" sz="1200" b="1" kern="0" spc="150" dirty="0">
-                <a:solidFill>
-                  <a:srgbClr val="A97C2F"/>
-                </a:solidFill>
-                <a:latin typeface="Calibri" pitchFamily="34" charset="0"/>
-                <a:ea typeface="Calibri" pitchFamily="34" charset="-122"/>
-                <a:cs typeface="Calibri" pitchFamily="34" charset="-120"/>
-              </a:rPr>
-              <a:t>BACKUP</a:t>
-            </a:r>
-            <a:endParaRPr lang="en-US" sz="1200" dirty="0"/>
-          </a:p>
-        </p:txBody>
-      </p:sp>
-      <p:sp>
-        <p:nvSpPr>
-          <p:cNvPr id="3" name="Text 0"/>
-          <p:cNvSpPr>
-            <a:spLocks noGrp="1"/>
-          </p:cNvSpPr>
-          <p:nvPr>
-            <p:ph type="title" idx="101" hasCustomPrompt="1"/>
-          </p:nvPr>
-        </p:nvSpPr>
-        <p:spPr>
-          <a:xfrm>
-            <a:off x="548640" y="566928"/>
-            <a:ext cx="11094415" cy="685800"/>
-          </a:xfrm>
-          <a:prstGeom prst="rect">
-            <a:avLst/>
-          </a:prstGeom>
-          <a:noFill/>
-          <a:ln/>
-        </p:spPr>
-        <p:txBody>
-          <a:bodyPr wrap="square" lIns="0" tIns="0" rIns="0" bIns="0" rtlCol="0" anchor="ctr"/>
-          <a:lstStyle/>
-          <a:p>
-            <a:pPr marL="0" indent="0" algn="l">
-              <a:buNone/>
-            </a:pPr>
-            <a:r>
-              <a:rPr lang="en-US" sz="2800" b="1" dirty="0">
-                <a:solidFill>
-                  <a:srgbClr val="1B2A4A"/>
-                </a:solidFill>
-                <a:latin typeface="Cambria" pitchFamily="34" charset="0"/>
-                <a:ea typeface="Cambria" pitchFamily="34" charset="-122"/>
-                <a:cs typeface="Cambria" pitchFamily="34" charset="-120"/>
-              </a:rPr>
-              <a:t>Anticipated Questions (3 of 3)</a:t>
-            </a:r>
-            <a:endParaRPr lang="en-US" sz="2800" dirty="0"/>
-          </a:p>
-        </p:txBody>
-      </p:sp>
-      <p:sp>
-        <p:nvSpPr>
-          <p:cNvPr id="5" name="q10_bg"/>
-          <p:cNvSpPr/>
-          <p:nvPr/>
-        </p:nvSpPr>
-        <p:spPr>
-          <a:xfrm>
-            <a:off x="548640" y="1417320"/>
-            <a:ext cx="11094415" cy="2240280"/>
-          </a:xfrm>
-          <a:prstGeom prst="roundRect">
-            <a:avLst>
-              <a:gd name="adj" fmla="val 3265"/>
-            </a:avLst>
-          </a:prstGeom>
-          <a:solidFill>
-            <a:srgbClr val="EEF2F8"/>
-          </a:solidFill>
-          <a:ln w="12700">
-            <a:solidFill>
-              <a:srgbClr val="EEF2F8"/>
-            </a:solidFill>
-            <a:prstDash val="solid"/>
-          </a:ln>
-        </p:spPr>
-        <p:txBody>
-          <a:bodyPr/>
-          <a:lstStyle/>
-          <a:p>
-            <a:endParaRPr lang="en-US"/>
-          </a:p>
-        </p:txBody>
-      </p:sp>
-      <p:sp>
-        <p:nvSpPr>
-          <p:cNvPr id="6" name="q10_head"/>
-          <p:cNvSpPr txBox="1"/>
-          <p:nvPr/>
-        </p:nvSpPr>
-        <p:spPr>
-          <a:xfrm>
-            <a:off x="777240" y="1600200"/>
-            <a:ext cx="10637215" cy="365760"/>
-          </a:xfrm>
-          <a:prstGeom prst="rect">
-            <a:avLst/>
-          </a:prstGeom>
-          <a:noFill/>
-          <a:ln/>
-        </p:spPr>
-        <p:txBody>
-          <a:bodyPr wrap="square" lIns="0" tIns="0" rIns="0" bIns="0" rtlCol="0" anchor="ctr"/>
-          <a:lstStyle/>
-          <a:p>
-            <a:pPr marL="0" indent="0">
-              <a:buNone/>
-            </a:pPr>
-            <a:r>
-              <a:rPr lang="en-US" sz="1800" b="1" dirty="0">
-                <a:solidFill>
-                  <a:srgbClr val="1B2A4A"/>
-                </a:solidFill>
-                <a:latin typeface="Cambria" pitchFamily="34" charset="0"/>
-                <a:ea typeface="Cambria" pitchFamily="34" charset="-122"/>
-                <a:cs typeface="Cambria" pitchFamily="34" charset="-120"/>
-              </a:rPr>
-              <a:t>Which parts of the results are real?</a:t>
-            </a:r>
-            <a:endParaRPr lang="en-US" sz="1800" dirty="0"/>
-          </a:p>
-        </p:txBody>
-      </p:sp>
-      <p:sp>
-        <p:nvSpPr>
-          <p:cNvPr id="7" name="a10"/>
-          <p:cNvSpPr txBox="1"/>
-          <p:nvPr/>
-        </p:nvSpPr>
-        <p:spPr>
-          <a:xfrm>
-            <a:off x="777240" y="2057400"/>
-            <a:ext cx="10637215" cy="1463040"/>
-          </a:xfrm>
-          <a:prstGeom prst="rect">
-            <a:avLst/>
-          </a:prstGeom>
-          <a:noFill/>
-          <a:ln/>
-        </p:spPr>
-        <p:txBody>
-          <a:bodyPr wrap="square" lIns="0" tIns="0" rIns="0" bIns="0" rtlCol="0" anchor="t"/>
-          <a:lstStyle/>
-          <a:p>
-            <a:pPr marL="0" indent="0">
-              <a:buNone/>
-            </a:pPr>
-            <a:r>
-              <a:rPr lang="en-US" sz="1600" dirty="0">
-                <a:solidFill>
-                  <a:srgbClr val="1F2933"/>
-                </a:solidFill>
-                <a:latin typeface="Calibri" pitchFamily="34" charset="0"/>
-                <a:ea typeface="Calibri" pitchFamily="34" charset="-122"/>
-                <a:cs typeface="Calibri" pitchFamily="34" charset="-120"/>
-              </a:rPr>
-              <a:t>Attendance is real: every patient in a scored session is a recorded appointment and comes exactly when the table says so, and the scoring weeks are never used for learning. The overbooking decisions in the logs, the waiting list and the reward weights are not in the table and are generated or assumed (slide 7).</a:t>
-            </a:r>
-            <a:endParaRPr lang="en-US" sz="1600" dirty="0"/>
-          </a:p>
-        </p:txBody>
-      </p:sp>
-      <p:sp>
-        <p:nvSpPr>
-          <p:cNvPr id="8" name="q1_bg"/>
-          <p:cNvSpPr/>
-          <p:nvPr/>
-        </p:nvSpPr>
-        <p:spPr>
-          <a:xfrm>
-            <a:off x="548640" y="3886200"/>
-            <a:ext cx="11094415" cy="2240280"/>
-          </a:xfrm>
-          <a:prstGeom prst="roundRect">
-            <a:avLst>
-              <a:gd name="adj" fmla="val 3265"/>
-            </a:avLst>
-          </a:prstGeom>
-          <a:solidFill>
-            <a:srgbClr val="EEF2F8"/>
-          </a:solidFill>
-          <a:ln w="12700">
-            <a:solidFill>
-              <a:srgbClr val="EEF2F8"/>
-            </a:solidFill>
-            <a:prstDash val="solid"/>
-          </a:ln>
-        </p:spPr>
-        <p:txBody>
-          <a:bodyPr/>
-          <a:lstStyle/>
-          <a:p>
-            <a:endParaRPr lang="en-US"/>
-          </a:p>
-        </p:txBody>
-      </p:sp>
-      <p:sp>
-        <p:nvSpPr>
-          <p:cNvPr id="9" name="q1_head"/>
-          <p:cNvSpPr txBox="1"/>
-          <p:nvPr/>
-        </p:nvSpPr>
-        <p:spPr>
-          <a:xfrm>
-            <a:off x="777240" y="4069080"/>
-            <a:ext cx="10637215" cy="365760"/>
-          </a:xfrm>
-          <a:prstGeom prst="rect">
-            <a:avLst/>
-          </a:prstGeom>
-          <a:noFill/>
-          <a:ln/>
-        </p:spPr>
-        <p:txBody>
-          <a:bodyPr wrap="square" lIns="0" tIns="0" rIns="0" bIns="0" rtlCol="0" anchor="ctr"/>
-          <a:lstStyle/>
-          <a:p>
-            <a:pPr marL="0" indent="0">
-              <a:buNone/>
-            </a:pPr>
-            <a:r>
-              <a:rPr lang="en-US" sz="1800" b="1" dirty="0">
-                <a:solidFill>
-                  <a:srgbClr val="1B2A4A"/>
-                </a:solidFill>
-                <a:latin typeface="Cambria" pitchFamily="34" charset="0"/>
-                <a:ea typeface="Cambria" pitchFamily="34" charset="-122"/>
-                <a:cs typeface="Cambria" pitchFamily="34" charset="-120"/>
-              </a:rPr>
-              <a:t>Why does no schedule reach 90% of the optimum?</a:t>
-            </a:r>
-            <a:endParaRPr lang="en-US" sz="1800" dirty="0"/>
-          </a:p>
-        </p:txBody>
-      </p:sp>
-      <p:sp>
-        <p:nvSpPr>
-          <p:cNvPr id="10" name="a1"/>
-          <p:cNvSpPr txBox="1"/>
-          <p:nvPr/>
-        </p:nvSpPr>
-        <p:spPr>
-          <a:xfrm>
-            <a:off x="777240" y="4526280"/>
-            <a:ext cx="10637215" cy="1463040"/>
-          </a:xfrm>
-          <a:prstGeom prst="rect">
-            <a:avLst/>
-          </a:prstGeom>
-          <a:noFill/>
-          <a:ln/>
-        </p:spPr>
-        <p:txBody>
-          <a:bodyPr wrap="square" lIns="0" tIns="0" rIns="0" bIns="0" rtlCol="0" anchor="t"/>
-          <a:lstStyle/>
-          <a:p>
-            <a:pPr marL="0" indent="0">
-              <a:buNone/>
-            </a:pPr>
-            <a:r>
-              <a:rPr lang="en-US" sz="1600" dirty="0">
-                <a:solidFill>
-                  <a:srgbClr val="1F2933"/>
-                </a:solidFill>
-                <a:latin typeface="Calibri" pitchFamily="34" charset="0"/>
-                <a:ea typeface="Calibri" pitchFamily="34" charset="-122"/>
-                <a:cs typeface="Calibri" pitchFamily="34" charset="-120"/>
-              </a:rPr>
-              <a:t>The learners solve a fitted model whose DP solution is worth about 126.6 on the oracle model, against a rule value of 113.6 and an optimum of 144.9. They end near that solution (Q-learning 124.4, MC 117.3), so the target is out of reach for any schedule; the limit is the support of the logged data, not exploration.</a:t>
-            </a:r>
-            <a:endParaRPr lang="en-US" sz="1600" dirty="0"/>
-          </a:p>
-        </p:txBody>
-      </p:sp>
-      <p:sp>
-        <p:nvSpPr>
-          <p:cNvPr id="25" name="Slide Number Placeholder 0"/>
-          <p:cNvSpPr>
-            <a:spLocks noGrp="1"/>
-          </p:cNvSpPr>
-          <p:nvPr>
-            <p:ph type="sldNum" sz="quarter" idx="4294967295"/>
-          </p:nvPr>
-        </p:nvSpPr>
-        <p:spPr>
-          <a:xfrm>
-            <a:off x="10911535" y="6400800"/>
-            <a:ext cx="731520" cy="274320"/>
-          </a:xfrm>
-          <a:prstGeom prst="rect">
-            <a:avLst/>
-          </a:prstGeom>
-          <a:extLst>
-            <a:ext uri="{C572A759-6A51-4108-AA02-DFA0A04FC94B}">
-              <ma14:wrappingTextBoxFlag xmlns:ma14="http://schemas.microsoft.com/office/mac/drawingml/2011/main" xmlns="" val="0"/>
-            </a:ext>
-          </a:extLst>
-        </p:spPr>
-        <p:txBody>
-          <a:bodyPr/>
-          <a:lstStyle>
-            <a:lvl1pPr>
-              <a:defRPr sz="1000">
-                <a:solidFill>
-                  <a:srgbClr val="5B6770"/>
-                </a:solidFill>
-                <a:latin typeface="Calibri"/>
-                <a:ea typeface="Calibri"/>
-                <a:cs typeface="Calibri"/>
-              </a:defRPr>
-            </a:lvl1pPr>
-          </a:lstStyle>
-          <a:p>
-            <a:pPr algn="r"/>
-            <a:fld id="{F7021451-1387-4CA6-816F-3879F97B5CBC}" type="slidenum">
-              <a:rPr lang="en-US" b="0"/>
-              <a:t>21</a:t>
             </a:fld>
             <a:endParaRPr lang="en-US"/>
           </a:p>
@@ -17896,7 +16479,7 @@
         </p:nvGraphicFramePr>
         <p:xfrm>
           <a:off x="548640" y="1417320"/>
-          <a:ext cx="11094415" cy="914400"/>
+          <a:ext cx="11094415" cy="4480560"/>
         </p:xfrm>
         <a:graphic>
           <a:graphicData uri="http://schemas.openxmlformats.org/drawingml/2006/table">
@@ -19350,7 +17933,7 @@
         </p:nvGraphicFramePr>
         <p:xfrm>
           <a:off x="7680960" y="2057400"/>
-          <a:ext cx="3730752" cy="914400"/>
+          <a:ext cx="3730752" cy="2304288"/>
         </p:xfrm>
         <a:graphic>
           <a:graphicData uri="http://schemas.openxmlformats.org/drawingml/2006/table">
